--- a/assets/powerpoints/module-n2-guichet/B1-l-ecran-parle-on-repond.pptx
+++ b/assets/powerpoints/module-n2-guichet/B1-l-ecran-parle-on-repond.pptx
@@ -12235,7 +12235,61 @@
                 </a:solidFill>
                 <a:latin typeface="Verdana"/>
               </a:rPr>
-              <a:t>Il n'y a ni « tu » ni « vous » devant le verbe. C'est la même forme que sur les affiches et dans les recettes : &lt;b&gt;Poussez&lt;/b&gt;, &lt;b&gt;Tirez&lt;/b&gt;, &lt;b&gt;Mélangez&lt;/b&gt;.</a:t>
+              <a:t>Il n'y a ni « tu » ni « vous » devant le verbe. C'est la même forme que sur les affiches et dans les recettes : </a:t>
+            </a:r>
+            <a:r>
+              <a:rPr sz="2000" b="1" i="0">
+                <a:solidFill>
+                  <a:srgbClr val="4B4F52"/>
+                </a:solidFill>
+                <a:latin typeface="Verdana"/>
+              </a:rPr>
+              <a:t>Poussez</a:t>
+            </a:r>
+            <a:r>
+              <a:rPr sz="2000" b="0" i="0">
+                <a:solidFill>
+                  <a:srgbClr val="4B4F52"/>
+                </a:solidFill>
+                <a:latin typeface="Verdana"/>
+              </a:rPr>
+              <a:t>, </a:t>
+            </a:r>
+            <a:r>
+              <a:rPr sz="2000" b="1" i="0">
+                <a:solidFill>
+                  <a:srgbClr val="4B4F52"/>
+                </a:solidFill>
+                <a:latin typeface="Verdana"/>
+              </a:rPr>
+              <a:t>Tirez</a:t>
+            </a:r>
+            <a:r>
+              <a:rPr sz="2000" b="0" i="0">
+                <a:solidFill>
+                  <a:srgbClr val="4B4F52"/>
+                </a:solidFill>
+                <a:latin typeface="Verdana"/>
+              </a:rPr>
+              <a:t>, </a:t>
+            </a:r>
+            <a:r>
+              <a:rPr sz="2000" b="1" i="0">
+                <a:solidFill>
+                  <a:srgbClr val="4B4F52"/>
+                </a:solidFill>
+                <a:latin typeface="Verdana"/>
+              </a:rPr>
+              <a:t>Mélangez</a:t>
+            </a:r>
+            <a:r>
+              <a:rPr sz="2000" b="0" i="0">
+                <a:solidFill>
+                  <a:srgbClr val="4B4F52"/>
+                </a:solidFill>
+                <a:latin typeface="Verdana"/>
+              </a:rPr>
+              <a:t>.</a:t>
             </a:r>
           </a:p>
         </p:txBody>
